--- a/examples/showcase/decks/incident-postmortem/inc-2431-incident-postmortem.pptx
+++ b/examples/showcase/decks/incident-postmortem/inc-2431-incident-postmortem.pptx
@@ -21,6 +21,11 @@
   </p:sldIdLst>
   <p:sldSz cx="12192000" cy="6858000"/>
   <p:notesSz cx="6858000" cy="9144000"/>
+  <p:defaultTextStyle>
+    <a:defPPr>
+      <a:defRPr lang="en-US"/>
+    </a:defPPr>
+  </p:defaultTextStyle>
 </p:presentation>
 </file>
 
@@ -97,6 +102,9 @@
   </p:cSld>
   <p:clrMap bg1="lt1" tx1="dk1" bg2="lt2" tx2="dk2" accent1="accent1" accent2="accent2" accent3="accent3" accent4="accent4" accent5="accent5" accent6="accent6" hlink="hlink" folHlink="folHlink"/>
   <p:notesStyle>
+    <a:defPPr>
+      <a:defRPr lang="en-US"/>
+    </a:defPPr>
     <a:lvl1pPr>
       <a:defRPr sz="1200"/>
     </a:lvl1pPr>
@@ -1125,16 +1133,26 @@
   </p:sldLayoutIdLst>
   <p:txStyles>
     <p:titleStyle>
+      <a:defPPr>
+        <a:defRPr lang="en-US"/>
+      </a:defPPr>
       <a:lvl1pPr algn="l">
         <a:defRPr sz="4400"/>
       </a:lvl1pPr>
     </p:titleStyle>
     <p:bodyStyle>
+      <a:defPPr>
+        <a:defRPr lang="en-US"/>
+      </a:defPPr>
       <a:lvl1pPr>
         <a:defRPr sz="2400"/>
       </a:lvl1pPr>
     </p:bodyStyle>
-    <p:otherStyle/>
+    <p:otherStyle>
+      <a:defPPr>
+        <a:defRPr lang="en-US"/>
+      </a:defPPr>
+    </p:otherStyle>
   </p:txStyles>
 </p:sldMaster>
 </file>
